--- a/media/resources/files/Onduktardyn_Orunduk_Maanisi_XjanaO.pptx
+++ b/media/resources/files/Onduktardyn_Orunduk_Maanisi_XjanaO.pptx
@@ -3929,7 +3929,7 @@
                 <a:ea typeface="+mn-ea"/>
                 <a:cs typeface="Arial" panose="020B0604020202020204" pitchFamily="34" charset="0"/>
               </a:rPr>
-              <a:t>Мугалим үчүн жооп баракчасы жана таратма материалдар камтылган.</a:t>
+              <a:t>Мугалим үчүн жооп барагы жана таратма материалдар бар.</a:t>
             </a:r>
           </a:p>
           <a:p>
@@ -3994,7 +3994,7 @@
                 <a:ea typeface="+mn-ea"/>
                 <a:cs typeface="Arial" panose="020B0604020202020204" pitchFamily="34" charset="0"/>
               </a:rPr>
-              <a:t>Кайсы команда туура жооп бергенине жараша '</a:t>
+              <a:t>Туура жооп берген командага жараша «</a:t>
             </a:r>
             <a:r>
               <a:rPr kumimoji="0" lang="en-GB" sz="2000" b="0" i="0" u="sng" strike="noStrike" kern="1200" cap="none" spc="0" normalizeH="0" baseline="0" noProof="0" dirty="0">
@@ -4011,7 +4011,7 @@
                 <a:ea typeface="+mn-ea"/>
                 <a:cs typeface="Arial" panose="020B0604020202020204" pitchFamily="34" charset="0"/>
               </a:rPr>
-              <a:t>X' </a:t>
+              <a:t>X» </a:t>
             </a:r>
             <a:r>
               <a:rPr kumimoji="0" lang="ru-RU" sz="2000" b="0" i="0" u="sng" strike="noStrike" kern="1200" cap="none" spc="0" normalizeH="0" baseline="0" noProof="0" dirty="0">
@@ -4028,7 +4028,7 @@
                 <a:ea typeface="+mn-ea"/>
                 <a:cs typeface="Arial" panose="020B0604020202020204" pitchFamily="34" charset="0"/>
               </a:rPr>
-              <a:t>же '</a:t>
+              <a:t>же «</a:t>
             </a:r>
             <a:r>
               <a:rPr kumimoji="0" lang="en-GB" sz="2000" b="0" i="0" u="sng" strike="noStrike" kern="1200" cap="none" spc="0" normalizeH="0" baseline="0" noProof="0" dirty="0">
@@ -4045,7 +4045,7 @@
                 <a:ea typeface="+mn-ea"/>
                 <a:cs typeface="Arial" panose="020B0604020202020204" pitchFamily="34" charset="0"/>
               </a:rPr>
-              <a:t>O' </a:t>
+              <a:t>O» </a:t>
             </a:r>
             <a:r>
               <a:rPr kumimoji="0" lang="ru-RU" sz="2000" b="0" i="0" u="sng" strike="noStrike" kern="1200" cap="none" spc="0" normalizeH="0" baseline="0" noProof="0" dirty="0">
@@ -4062,7 +4062,7 @@
                 <a:ea typeface="+mn-ea"/>
                 <a:cs typeface="Arial" panose="020B0604020202020204" pitchFamily="34" charset="0"/>
               </a:rPr>
-              <a:t>баскычын басыңыз/тийип коюңуз</a:t>
+              <a:t>баскычын басыңыз</a:t>
             </a:r>
             <a:r>
               <a:rPr kumimoji="0" lang="en-GB" sz="2000" b="0" i="0" u="none" strike="noStrike" kern="1200" cap="none" spc="0" normalizeH="0" baseline="0" noProof="0" dirty="0">
@@ -4588,7 +4588,7 @@
             <a:pPr algn="ctr"/>
             <a:r>
               <a:rPr lang="en-GB" sz="6000" dirty="0"/>
-              <a:t>7.429</a:t>
+              <a:t>7,429</a:t>
             </a:r>
             <a:endParaRPr lang="en-GB" sz="4000" dirty="0"/>
           </a:p>
@@ -4669,7 +4669,7 @@
             <a:pPr algn="ctr"/>
             <a:r>
               <a:rPr lang="en-GB" sz="6000" dirty="0"/>
-              <a:t>2.37</a:t>
+              <a:t>2,37</a:t>
             </a:r>
             <a:endParaRPr lang="en-GB" sz="4000" dirty="0"/>
           </a:p>
@@ -4750,7 +4750,7 @@
             <a:pPr algn="ctr"/>
             <a:r>
               <a:rPr lang="en-GB" sz="6000" dirty="0"/>
-              <a:t>9.58</a:t>
+              <a:t>9,58</a:t>
             </a:r>
             <a:endParaRPr lang="en-GB" sz="4000" dirty="0"/>
           </a:p>
@@ -4831,7 +4831,7 @@
             <a:pPr algn="ctr"/>
             <a:r>
               <a:rPr lang="en-GB" sz="6000" dirty="0"/>
-              <a:t>0.90655</a:t>
+              <a:t>0,90655</a:t>
             </a:r>
             <a:endParaRPr lang="en-GB" sz="4000" dirty="0"/>
           </a:p>
@@ -4912,7 +4912,7 @@
             <a:pPr algn="ctr"/>
             <a:r>
               <a:rPr lang="en-GB" sz="6000" dirty="0"/>
-              <a:t>3.973</a:t>
+              <a:t>3,973</a:t>
             </a:r>
             <a:endParaRPr lang="en-GB" sz="4000" dirty="0"/>
           </a:p>
@@ -4993,7 +4993,7 @@
             <a:pPr algn="ctr"/>
             <a:r>
               <a:rPr lang="en-GB" sz="6000" dirty="0"/>
-              <a:t>0.2876</a:t>
+              <a:t>0,2876</a:t>
             </a:r>
             <a:endParaRPr lang="en-GB" sz="4000" dirty="0"/>
           </a:p>
@@ -5074,7 +5074,7 @@
             <a:pPr algn="ctr"/>
             <a:r>
               <a:rPr lang="en-GB" sz="6000" dirty="0"/>
-              <a:t>4.42041</a:t>
+              <a:t>4,42041</a:t>
             </a:r>
             <a:endParaRPr lang="en-GB" sz="4000" dirty="0"/>
           </a:p>
@@ -5155,7 +5155,7 @@
             <a:pPr algn="ctr"/>
             <a:r>
               <a:rPr lang="en-GB" sz="6000" dirty="0"/>
-              <a:t>8.227</a:t>
+              <a:t>8,227</a:t>
             </a:r>
             <a:endParaRPr lang="en-GB" sz="4000" dirty="0"/>
           </a:p>
@@ -5236,7 +5236,7 @@
             <a:pPr algn="ctr"/>
             <a:r>
               <a:rPr lang="en-GB" sz="6000" dirty="0"/>
-              <a:t>5.71</a:t>
+              <a:t>5,71</a:t>
             </a:r>
             <a:endParaRPr lang="en-GB" sz="4000" dirty="0"/>
           </a:p>

--- a/media/resources/files/Onduktardyn_Orunduk_Maanisi_XjanaO.pptx
+++ b/media/resources/files/Onduktardyn_Orunduk_Maanisi_XjanaO.pptx
@@ -4831,7 +4831,7 @@
             <a:pPr algn="ctr"/>
             <a:r>
               <a:rPr lang="en-GB" sz="6000" dirty="0"/>
-              <a:t>0,90655</a:t>
+              <a:t>0,90 655</a:t>
             </a:r>
             <a:endParaRPr lang="en-GB" sz="4000" dirty="0"/>
           </a:p>
@@ -5074,7 +5074,7 @@
             <a:pPr algn="ctr"/>
             <a:r>
               <a:rPr lang="en-GB" sz="6000" dirty="0"/>
-              <a:t>4,42041</a:t>
+              <a:t>4,42 041</a:t>
             </a:r>
             <a:endParaRPr lang="en-GB" sz="4000" dirty="0"/>
           </a:p>
